--- a/reports/08-risk-heatmap.pptx
+++ b/reports/08-risk-heatmap.pptx
@@ -107,7 +107,7 @@
   <p:extLst>
     <p:ext uri="{521415D9-36F7-43E2-AB2F-B90AF26B5E84}">
       <p14:sectionLst xmlns:p14="http://schemas.microsoft.com/office/powerpoint/2010/main">
-        <p14:section name="Risk heat map" id="{6f0df5ed-a505-9140-a04c-9a21c651bf54}">
+        <p14:section name="Risk heat map" id="{7f9708ad-b881-9b2e-f322-1a21c9d12857}">
           <p14:sldIdLst>
             <p14:sldId id="256"/>
           </p14:sldIdLst>
@@ -1703,7 +1703,7 @@
         </p:nvSpPr>
         <p:spPr>
           <a:xfrm>
-            <a:off x="4023360" y="3566160"/>
+            <a:off x="3794760" y="3566160"/>
             <a:ext cx="365760" cy="365760"/>
           </a:xfrm>
           <a:prstGeom prst="ellipse">
@@ -1728,7 +1728,7 @@
         </p:nvSpPr>
         <p:spPr>
           <a:xfrm>
-            <a:off x="4023360" y="3566160"/>
+            <a:off x="3794760" y="3566160"/>
             <a:ext cx="365760" cy="365760"/>
           </a:xfrm>
           <a:prstGeom prst="rect">
@@ -1764,7 +1764,7 @@
         </p:nvSpPr>
         <p:spPr>
           <a:xfrm>
-            <a:off x="4151376" y="3566160"/>
+            <a:off x="4251960" y="3566160"/>
             <a:ext cx="365760" cy="365760"/>
           </a:xfrm>
           <a:prstGeom prst="ellipse">
@@ -1789,7 +1789,7 @@
         </p:nvSpPr>
         <p:spPr>
           <a:xfrm>
-            <a:off x="4151376" y="3566160"/>
+            <a:off x="4251960" y="3566160"/>
             <a:ext cx="365760" cy="365760"/>
           </a:xfrm>
           <a:prstGeom prst="rect">
